--- a/class/cloud_infra_mgmt/03주차_Docker심화/01_강의자료/3차시_이미지최적화와DockerHub배포.pptx
+++ b/class/cloud_infra_mgmt/03주차_Docker심화/01_강의자료/3차시_이미지최적화와DockerHub배포.pptx
@@ -5238,7 +5238,7 @@
           <a:p>
             <a:pPr>
               <a:lnSpc>
-                <a:spcPct val="115000"/>
+                <a:spcPct val="149500"/>
               </a:lnSpc>
             </a:pPr>
             <a:r>
@@ -5263,7 +5263,7 @@
           <a:p>
             <a:pPr>
               <a:lnSpc>
-                <a:spcPct val="115000"/>
+                <a:spcPct val="149500"/>
               </a:lnSpc>
             </a:pPr>
             <a:r>
@@ -5288,7 +5288,7 @@
           <a:p>
             <a:pPr>
               <a:lnSpc>
-                <a:spcPct val="115000"/>
+                <a:spcPct val="149500"/>
               </a:lnSpc>
             </a:pPr>
             <a:r>
@@ -5313,7 +5313,7 @@
           <a:p>
             <a:pPr>
               <a:lnSpc>
-                <a:spcPct val="115000"/>
+                <a:spcPct val="149500"/>
               </a:lnSpc>
             </a:pPr>
             <a:r>
@@ -6821,16 +6821,104 @@
       </p:sp>
       <p:sp>
         <p:nvSpPr>
-          <p:cNvPr id="7" name="Isosceles Triangle 6"/>
+          <p:cNvPr id="7" name="Rectangle 6"/>
           <p:cNvSpPr/>
           <p:nvPr/>
         </p:nvSpPr>
         <p:spPr>
-          <a:xfrm rot="5400000">
-            <a:off x="3495751" y="1673352"/>
-            <a:ext cx="146304" cy="146304"/>
-          </a:xfrm>
-          <a:prstGeom prst="triangle">
+          <a:xfrm>
+            <a:off x="5096865" y="1730959"/>
+            <a:ext cx="1995220" cy="31089"/>
+          </a:xfrm>
+          <a:prstGeom prst="rect">
+            <a:avLst/>
+          </a:prstGeom>
+          <a:solidFill>
+            <a:srgbClr val="14B8A6"/>
+          </a:solidFill>
+          <a:ln>
+            <a:noFill/>
+          </a:ln>
+          <a:effectLst/>
+        </p:spPr>
+        <p:style>
+          <a:lnRef idx="1">
+            <a:schemeClr val="accent1"/>
+          </a:lnRef>
+          <a:fillRef idx="3">
+            <a:schemeClr val="accent1"/>
+          </a:fillRef>
+          <a:effectRef idx="2">
+            <a:schemeClr val="accent1"/>
+          </a:effectRef>
+          <a:fontRef idx="minor">
+            <a:schemeClr val="lt1"/>
+          </a:fontRef>
+        </p:style>
+        <p:txBody>
+          <a:bodyPr rtlCol="0" anchor="ctr"/>
+          <a:lstStyle/>
+          <a:p>
+            <a:pPr algn="ctr"/>
+          </a:p>
+        </p:txBody>
+      </p:sp>
+      <p:sp>
+        <p:nvSpPr>
+          <p:cNvPr id="8" name="Rectangle 7"/>
+          <p:cNvSpPr/>
+          <p:nvPr/>
+        </p:nvSpPr>
+        <p:spPr>
+          <a:xfrm>
+            <a:off x="7622438" y="1730959"/>
+            <a:ext cx="1995220" cy="31089"/>
+          </a:xfrm>
+          <a:prstGeom prst="rect">
+            <a:avLst/>
+          </a:prstGeom>
+          <a:solidFill>
+            <a:srgbClr val="14B8A6"/>
+          </a:solidFill>
+          <a:ln>
+            <a:noFill/>
+          </a:ln>
+          <a:effectLst/>
+        </p:spPr>
+        <p:style>
+          <a:lnRef idx="1">
+            <a:schemeClr val="accent1"/>
+          </a:lnRef>
+          <a:fillRef idx="3">
+            <a:schemeClr val="accent1"/>
+          </a:fillRef>
+          <a:effectRef idx="2">
+            <a:schemeClr val="accent1"/>
+          </a:effectRef>
+          <a:fontRef idx="minor">
+            <a:schemeClr val="lt1"/>
+          </a:fontRef>
+        </p:style>
+        <p:txBody>
+          <a:bodyPr rtlCol="0" anchor="ctr"/>
+          <a:lstStyle/>
+          <a:p>
+            <a:pPr algn="ctr"/>
+          </a:p>
+        </p:txBody>
+      </p:sp>
+      <p:sp>
+        <p:nvSpPr>
+          <p:cNvPr id="9" name="Oval 8"/>
+          <p:cNvSpPr/>
+          <p:nvPr/>
+        </p:nvSpPr>
+        <p:spPr>
+          <a:xfrm>
+            <a:off x="2040940" y="1481328"/>
+            <a:ext cx="530352" cy="530352"/>
+          </a:xfrm>
+          <a:prstGeom prst="ellipse">
             <a:avLst/>
           </a:prstGeom>
           <a:solidFill>
@@ -6865,227 +6953,7 @@
       </p:sp>
       <p:sp>
         <p:nvSpPr>
-          <p:cNvPr id="8" name="Rectangle 7"/>
-          <p:cNvSpPr/>
-          <p:nvPr/>
-        </p:nvSpPr>
-        <p:spPr>
-          <a:xfrm>
-            <a:off x="5096865" y="1730959"/>
-            <a:ext cx="1995220" cy="31089"/>
-          </a:xfrm>
-          <a:prstGeom prst="rect">
-            <a:avLst/>
-          </a:prstGeom>
-          <a:solidFill>
-            <a:srgbClr val="14B8A6"/>
-          </a:solidFill>
-          <a:ln>
-            <a:noFill/>
-          </a:ln>
-          <a:effectLst/>
-        </p:spPr>
-        <p:style>
-          <a:lnRef idx="1">
-            <a:schemeClr val="accent1"/>
-          </a:lnRef>
-          <a:fillRef idx="3">
-            <a:schemeClr val="accent1"/>
-          </a:fillRef>
-          <a:effectRef idx="2">
-            <a:schemeClr val="accent1"/>
-          </a:effectRef>
-          <a:fontRef idx="minor">
-            <a:schemeClr val="lt1"/>
-          </a:fontRef>
-        </p:style>
-        <p:txBody>
-          <a:bodyPr rtlCol="0" anchor="ctr"/>
-          <a:lstStyle/>
-          <a:p>
-            <a:pPr algn="ctr"/>
-          </a:p>
-        </p:txBody>
-      </p:sp>
-      <p:sp>
-        <p:nvSpPr>
-          <p:cNvPr id="9" name="Isosceles Triangle 8"/>
-          <p:cNvSpPr/>
-          <p:nvPr/>
-        </p:nvSpPr>
-        <p:spPr>
-          <a:xfrm rot="5400000">
-            <a:off x="6021324" y="1673352"/>
-            <a:ext cx="146304" cy="146304"/>
-          </a:xfrm>
-          <a:prstGeom prst="triangle">
-            <a:avLst/>
-          </a:prstGeom>
-          <a:solidFill>
-            <a:srgbClr val="0D9488"/>
-          </a:solidFill>
-          <a:ln>
-            <a:noFill/>
-          </a:ln>
-          <a:effectLst/>
-        </p:spPr>
-        <p:style>
-          <a:lnRef idx="1">
-            <a:schemeClr val="accent1"/>
-          </a:lnRef>
-          <a:fillRef idx="3">
-            <a:schemeClr val="accent1"/>
-          </a:fillRef>
-          <a:effectRef idx="2">
-            <a:schemeClr val="accent1"/>
-          </a:effectRef>
-          <a:fontRef idx="minor">
-            <a:schemeClr val="lt1"/>
-          </a:fontRef>
-        </p:style>
-        <p:txBody>
-          <a:bodyPr rtlCol="0" anchor="ctr"/>
-          <a:lstStyle/>
-          <a:p>
-            <a:pPr algn="ctr"/>
-          </a:p>
-        </p:txBody>
-      </p:sp>
-      <p:sp>
-        <p:nvSpPr>
-          <p:cNvPr id="10" name="Rectangle 9"/>
-          <p:cNvSpPr/>
-          <p:nvPr/>
-        </p:nvSpPr>
-        <p:spPr>
-          <a:xfrm>
-            <a:off x="7622438" y="1730959"/>
-            <a:ext cx="1995220" cy="31089"/>
-          </a:xfrm>
-          <a:prstGeom prst="rect">
-            <a:avLst/>
-          </a:prstGeom>
-          <a:solidFill>
-            <a:srgbClr val="14B8A6"/>
-          </a:solidFill>
-          <a:ln>
-            <a:noFill/>
-          </a:ln>
-          <a:effectLst/>
-        </p:spPr>
-        <p:style>
-          <a:lnRef idx="1">
-            <a:schemeClr val="accent1"/>
-          </a:lnRef>
-          <a:fillRef idx="3">
-            <a:schemeClr val="accent1"/>
-          </a:fillRef>
-          <a:effectRef idx="2">
-            <a:schemeClr val="accent1"/>
-          </a:effectRef>
-          <a:fontRef idx="minor">
-            <a:schemeClr val="lt1"/>
-          </a:fontRef>
-        </p:style>
-        <p:txBody>
-          <a:bodyPr rtlCol="0" anchor="ctr"/>
-          <a:lstStyle/>
-          <a:p>
-            <a:pPr algn="ctr"/>
-          </a:p>
-        </p:txBody>
-      </p:sp>
-      <p:sp>
-        <p:nvSpPr>
-          <p:cNvPr id="11" name="Isosceles Triangle 10"/>
-          <p:cNvSpPr/>
-          <p:nvPr/>
-        </p:nvSpPr>
-        <p:spPr>
-          <a:xfrm rot="5400000">
-            <a:off x="8546896" y="1673352"/>
-            <a:ext cx="146304" cy="146304"/>
-          </a:xfrm>
-          <a:prstGeom prst="triangle">
-            <a:avLst/>
-          </a:prstGeom>
-          <a:solidFill>
-            <a:srgbClr val="0D9488"/>
-          </a:solidFill>
-          <a:ln>
-            <a:noFill/>
-          </a:ln>
-          <a:effectLst/>
-        </p:spPr>
-        <p:style>
-          <a:lnRef idx="1">
-            <a:schemeClr val="accent1"/>
-          </a:lnRef>
-          <a:fillRef idx="3">
-            <a:schemeClr val="accent1"/>
-          </a:fillRef>
-          <a:effectRef idx="2">
-            <a:schemeClr val="accent1"/>
-          </a:effectRef>
-          <a:fontRef idx="minor">
-            <a:schemeClr val="lt1"/>
-          </a:fontRef>
-        </p:style>
-        <p:txBody>
-          <a:bodyPr rtlCol="0" anchor="ctr"/>
-          <a:lstStyle/>
-          <a:p>
-            <a:pPr algn="ctr"/>
-          </a:p>
-        </p:txBody>
-      </p:sp>
-      <p:sp>
-        <p:nvSpPr>
-          <p:cNvPr id="12" name="Oval 11"/>
-          <p:cNvSpPr/>
-          <p:nvPr/>
-        </p:nvSpPr>
-        <p:spPr>
-          <a:xfrm>
-            <a:off x="2040940" y="1481328"/>
-            <a:ext cx="530352" cy="530352"/>
-          </a:xfrm>
-          <a:prstGeom prst="ellipse">
-            <a:avLst/>
-          </a:prstGeom>
-          <a:solidFill>
-            <a:srgbClr val="0D9488"/>
-          </a:solidFill>
-          <a:ln>
-            <a:noFill/>
-          </a:ln>
-          <a:effectLst/>
-        </p:spPr>
-        <p:style>
-          <a:lnRef idx="1">
-            <a:schemeClr val="accent1"/>
-          </a:lnRef>
-          <a:fillRef idx="3">
-            <a:schemeClr val="accent1"/>
-          </a:fillRef>
-          <a:effectRef idx="2">
-            <a:schemeClr val="accent1"/>
-          </a:effectRef>
-          <a:fontRef idx="minor">
-            <a:schemeClr val="lt1"/>
-          </a:fontRef>
-        </p:style>
-        <p:txBody>
-          <a:bodyPr rtlCol="0" anchor="ctr"/>
-          <a:lstStyle/>
-          <a:p>
-            <a:pPr algn="ctr"/>
-          </a:p>
-        </p:txBody>
-      </p:sp>
-      <p:sp>
-        <p:nvSpPr>
-          <p:cNvPr id="13" name="TextBox 12"/>
+          <p:cNvPr id="10" name="TextBox 9"/>
           <p:cNvSpPr txBox="1"/>
           <p:nvPr/>
         </p:nvSpPr>
@@ -7120,7 +6988,7 @@
       </p:sp>
       <p:sp>
         <p:nvSpPr>
-          <p:cNvPr id="14" name="Rounded Rectangle 13"/>
+          <p:cNvPr id="11" name="Rounded Rectangle 10"/>
           <p:cNvSpPr/>
           <p:nvPr/>
         </p:nvSpPr>
@@ -7168,7 +7036,7 @@
       </p:sp>
       <p:sp>
         <p:nvSpPr>
-          <p:cNvPr id="15" name="TextBox 14"/>
+          <p:cNvPr id="12" name="TextBox 11"/>
           <p:cNvSpPr txBox="1"/>
           <p:nvPr/>
         </p:nvSpPr>
@@ -7203,7 +7071,7 @@
       </p:sp>
       <p:sp>
         <p:nvSpPr>
-          <p:cNvPr id="16" name="TextBox 15"/>
+          <p:cNvPr id="13" name="TextBox 12"/>
           <p:cNvSpPr txBox="1"/>
           <p:nvPr/>
         </p:nvSpPr>
@@ -7242,7 +7110,7 @@
       </p:sp>
       <p:sp>
         <p:nvSpPr>
-          <p:cNvPr id="17" name="Oval 16"/>
+          <p:cNvPr id="14" name="Oval 13"/>
           <p:cNvSpPr/>
           <p:nvPr/>
         </p:nvSpPr>
@@ -7286,7 +7154,7 @@
       </p:sp>
       <p:sp>
         <p:nvSpPr>
-          <p:cNvPr id="18" name="TextBox 17"/>
+          <p:cNvPr id="15" name="TextBox 14"/>
           <p:cNvSpPr txBox="1"/>
           <p:nvPr/>
         </p:nvSpPr>
@@ -7321,7 +7189,7 @@
       </p:sp>
       <p:sp>
         <p:nvSpPr>
-          <p:cNvPr id="19" name="Rounded Rectangle 18"/>
+          <p:cNvPr id="16" name="Rounded Rectangle 15"/>
           <p:cNvSpPr/>
           <p:nvPr/>
         </p:nvSpPr>
@@ -7369,7 +7237,7 @@
       </p:sp>
       <p:sp>
         <p:nvSpPr>
-          <p:cNvPr id="20" name="TextBox 19"/>
+          <p:cNvPr id="17" name="TextBox 16"/>
           <p:cNvSpPr txBox="1"/>
           <p:nvPr/>
         </p:nvSpPr>
@@ -7404,7 +7272,7 @@
       </p:sp>
       <p:sp>
         <p:nvSpPr>
-          <p:cNvPr id="21" name="TextBox 20"/>
+          <p:cNvPr id="18" name="TextBox 17"/>
           <p:cNvSpPr txBox="1"/>
           <p:nvPr/>
         </p:nvSpPr>
@@ -7443,7 +7311,7 @@
       </p:sp>
       <p:sp>
         <p:nvSpPr>
-          <p:cNvPr id="22" name="Oval 21"/>
+          <p:cNvPr id="19" name="Oval 18"/>
           <p:cNvSpPr/>
           <p:nvPr/>
         </p:nvSpPr>
@@ -7487,7 +7355,7 @@
       </p:sp>
       <p:sp>
         <p:nvSpPr>
-          <p:cNvPr id="23" name="TextBox 22"/>
+          <p:cNvPr id="20" name="TextBox 19"/>
           <p:cNvSpPr txBox="1"/>
           <p:nvPr/>
         </p:nvSpPr>
@@ -7522,7 +7390,7 @@
       </p:sp>
       <p:sp>
         <p:nvSpPr>
-          <p:cNvPr id="24" name="Rounded Rectangle 23"/>
+          <p:cNvPr id="21" name="Rounded Rectangle 20"/>
           <p:cNvSpPr/>
           <p:nvPr/>
         </p:nvSpPr>
@@ -7570,7 +7438,7 @@
       </p:sp>
       <p:sp>
         <p:nvSpPr>
-          <p:cNvPr id="25" name="TextBox 24"/>
+          <p:cNvPr id="22" name="TextBox 21"/>
           <p:cNvSpPr txBox="1"/>
           <p:nvPr/>
         </p:nvSpPr>
@@ -7605,7 +7473,7 @@
       </p:sp>
       <p:sp>
         <p:nvSpPr>
-          <p:cNvPr id="26" name="TextBox 25"/>
+          <p:cNvPr id="23" name="TextBox 22"/>
           <p:cNvSpPr txBox="1"/>
           <p:nvPr/>
         </p:nvSpPr>
@@ -7644,7 +7512,7 @@
       </p:sp>
       <p:sp>
         <p:nvSpPr>
-          <p:cNvPr id="27" name="Oval 26"/>
+          <p:cNvPr id="24" name="Oval 23"/>
           <p:cNvSpPr/>
           <p:nvPr/>
         </p:nvSpPr>
@@ -7688,7 +7556,7 @@
       </p:sp>
       <p:sp>
         <p:nvSpPr>
-          <p:cNvPr id="28" name="TextBox 27"/>
+          <p:cNvPr id="25" name="TextBox 24"/>
           <p:cNvSpPr txBox="1"/>
           <p:nvPr/>
         </p:nvSpPr>
@@ -7723,7 +7591,7 @@
       </p:sp>
       <p:sp>
         <p:nvSpPr>
-          <p:cNvPr id="29" name="Rounded Rectangle 28"/>
+          <p:cNvPr id="26" name="Rounded Rectangle 25"/>
           <p:cNvSpPr/>
           <p:nvPr/>
         </p:nvSpPr>
@@ -7771,7 +7639,7 @@
       </p:sp>
       <p:sp>
         <p:nvSpPr>
-          <p:cNvPr id="30" name="TextBox 29"/>
+          <p:cNvPr id="27" name="TextBox 26"/>
           <p:cNvSpPr txBox="1"/>
           <p:nvPr/>
         </p:nvSpPr>
@@ -7806,7 +7674,7 @@
       </p:sp>
       <p:sp>
         <p:nvSpPr>
-          <p:cNvPr id="31" name="TextBox 30"/>
+          <p:cNvPr id="28" name="TextBox 27"/>
           <p:cNvSpPr txBox="1"/>
           <p:nvPr/>
         </p:nvSpPr>
@@ -7845,7 +7713,7 @@
       </p:sp>
       <p:sp>
         <p:nvSpPr>
-          <p:cNvPr id="32" name="TextBox 31"/>
+          <p:cNvPr id="29" name="TextBox 28"/>
           <p:cNvSpPr txBox="1"/>
           <p:nvPr/>
         </p:nvSpPr>
@@ -7880,7 +7748,7 @@
       </p:sp>
       <p:sp>
         <p:nvSpPr>
-          <p:cNvPr id="33" name="TextBox 32"/>
+          <p:cNvPr id="30" name="TextBox 29"/>
           <p:cNvSpPr txBox="1"/>
           <p:nvPr/>
         </p:nvSpPr>
@@ -7915,7 +7783,7 @@
       </p:sp>
       <p:sp>
         <p:nvSpPr>
-          <p:cNvPr id="34" name="Rectangle 33"/>
+          <p:cNvPr id="31" name="Rectangle 30"/>
           <p:cNvSpPr/>
           <p:nvPr/>
         </p:nvSpPr>
@@ -8439,7 +8307,7 @@
           <a:p>
             <a:pPr>
               <a:lnSpc>
-                <a:spcPct val="115000"/>
+                <a:spcPct val="149500"/>
               </a:lnSpc>
             </a:pPr>
             <a:r>
@@ -8464,7 +8332,7 @@
           <a:p>
             <a:pPr>
               <a:lnSpc>
-                <a:spcPct val="115000"/>
+                <a:spcPct val="149500"/>
               </a:lnSpc>
             </a:pPr>
             <a:r>
@@ -8489,7 +8357,7 @@
           <a:p>
             <a:pPr>
               <a:lnSpc>
-                <a:spcPct val="115000"/>
+                <a:spcPct val="149500"/>
               </a:lnSpc>
             </a:pPr>
             <a:r>
@@ -10277,7 +10145,7 @@
           <a:p>
             <a:pPr>
               <a:lnSpc>
-                <a:spcPct val="115000"/>
+                <a:spcPct val="149500"/>
               </a:lnSpc>
             </a:pPr>
             <a:r>
@@ -10302,7 +10170,7 @@
           <a:p>
             <a:pPr>
               <a:lnSpc>
-                <a:spcPct val="115000"/>
+                <a:spcPct val="149500"/>
               </a:lnSpc>
             </a:pPr>
             <a:r>
@@ -10327,7 +10195,7 @@
           <a:p>
             <a:pPr>
               <a:lnSpc>
-                <a:spcPct val="115000"/>
+                <a:spcPct val="149500"/>
               </a:lnSpc>
             </a:pPr>
             <a:r>
@@ -10352,7 +10220,7 @@
           <a:p>
             <a:pPr>
               <a:lnSpc>
-                <a:spcPct val="115000"/>
+                <a:spcPct val="149500"/>
               </a:lnSpc>
             </a:pPr>
             <a:r>
@@ -10743,7 +10611,7 @@
           <a:p>
             <a:pPr>
               <a:lnSpc>
-                <a:spcPct val="115000"/>
+                <a:spcPct val="149500"/>
               </a:lnSpc>
             </a:pPr>
             <a:r>
@@ -10768,7 +10636,7 @@
           <a:p>
             <a:pPr>
               <a:lnSpc>
-                <a:spcPct val="115000"/>
+                <a:spcPct val="149500"/>
               </a:lnSpc>
             </a:pPr>
             <a:r>
@@ -10793,7 +10661,7 @@
           <a:p>
             <a:pPr>
               <a:lnSpc>
-                <a:spcPct val="115000"/>
+                <a:spcPct val="149500"/>
               </a:lnSpc>
             </a:pPr>
             <a:r>
@@ -10818,7 +10686,7 @@
           <a:p>
             <a:pPr>
               <a:lnSpc>
-                <a:spcPct val="115000"/>
+                <a:spcPct val="149500"/>
               </a:lnSpc>
             </a:pPr>
             <a:r>

--- a/class/cloud_infra_mgmt/03주차_Docker심화/01_강의자료/3차시_이미지최적화와DockerHub배포.pptx
+++ b/class/cloud_infra_mgmt/03주차_Docker심화/01_강의자료/3차시_이미지최적화와DockerHub배포.pptx
@@ -4862,6 +4862,8 @@
                   <a:srgbClr val="14B8A6"/>
                 </a:solidFill>
                 <a:latin typeface="맑은 고딕"/>
+                <a:ea typeface="맑은 고딕"/>
+                <a:cs typeface="맑은 고딕"/>
               </a:rPr>
               <a:t>클라우드인프라관리  ·  3주차 3차시</a:t>
             </a:r>
@@ -4897,6 +4899,8 @@
                   <a:srgbClr val="FFFFFF"/>
                 </a:solidFill>
                 <a:latin typeface="맑은 고딕"/>
+                <a:ea typeface="맑은 고딕"/>
+                <a:cs typeface="맑은 고딕"/>
               </a:rPr>
               <a:t>이미지 최적화와</a:t>
             </a:r>
@@ -4909,6 +4913,8 @@
                   <a:srgbClr val="FFFFFF"/>
                 </a:solidFill>
                 <a:latin typeface="맑은 고딕"/>
+                <a:ea typeface="맑은 고딕"/>
+                <a:cs typeface="맑은 고딕"/>
               </a:rPr>
               <a:t>Docker Hub 배포</a:t>
             </a:r>
@@ -4944,6 +4950,8 @@
                   <a:srgbClr val="C9D3E6"/>
                 </a:solidFill>
                 <a:latin typeface="맑은 고딕"/>
+                <a:ea typeface="맑은 고딕"/>
+                <a:cs typeface="맑은 고딕"/>
               </a:rPr>
               <a:t>레이어 캐싱 · .dockerignore · (선택) push</a:t>
             </a:r>
@@ -4979,6 +4987,8 @@
                   <a:srgbClr val="FFFFFF"/>
                 </a:solidFill>
                 <a:latin typeface="맑은 고딕"/>
+                <a:ea typeface="맑은 고딕"/>
+                <a:cs typeface="맑은 고딕"/>
               </a:rPr>
               <a:t>영남이공대학교 김지윤교수</a:t>
             </a:r>
@@ -5138,6 +5148,8 @@
                   <a:srgbClr val="14213D"/>
                 </a:solidFill>
                 <a:latin typeface="맑은 고딕"/>
+                <a:ea typeface="맑은 고딕"/>
+                <a:cs typeface="맑은 고딕"/>
               </a:rPr>
               <a:t>03</a:t>
             </a:r>
@@ -5173,6 +5185,8 @@
                   <a:srgbClr val="14B8A6"/>
                 </a:solidFill>
                 <a:latin typeface="맑은 고딕"/>
+                <a:ea typeface="맑은 고딕"/>
+                <a:cs typeface="맑은 고딕"/>
               </a:rPr>
               <a:t>실습 안내</a:t>
             </a:r>
@@ -5208,6 +5222,8 @@
                   <a:srgbClr val="FFFFFF"/>
                 </a:solidFill>
                 <a:latin typeface="맑은 고딕"/>
+                <a:ea typeface="맑은 고딕"/>
+                <a:cs typeface="맑은 고딕"/>
               </a:rPr>
               <a:t>(선택 심화) Docker Hub push</a:t>
             </a:r>
@@ -5247,6 +5263,8 @@
                   <a:srgbClr val="0D9488"/>
                 </a:solidFill>
                 <a:latin typeface="맑은 고딕"/>
+                <a:ea typeface="맑은 고딕"/>
+                <a:cs typeface="맑은 고딕"/>
               </a:rPr>
               <a:t>●  </a:t>
             </a:r>
@@ -5256,6 +5274,8 @@
                   <a:srgbClr val="222733"/>
                 </a:solidFill>
                 <a:latin typeface="맑은 고딕"/>
+                <a:ea typeface="맑은 고딕"/>
+                <a:cs typeface="맑은 고딕"/>
               </a:rPr>
               <a:t>docker login  — Docker ID·비밀번호로 로그인</a:t>
             </a:r>
@@ -5272,6 +5292,8 @@
                   <a:srgbClr val="0D9488"/>
                 </a:solidFill>
                 <a:latin typeface="맑은 고딕"/>
+                <a:ea typeface="맑은 고딕"/>
+                <a:cs typeface="맑은 고딕"/>
               </a:rPr>
               <a:t>●  </a:t>
             </a:r>
@@ -5281,6 +5303,8 @@
                   <a:srgbClr val="222733"/>
                 </a:solidFill>
                 <a:latin typeface="맑은 고딕"/>
+                <a:ea typeface="맑은 고딕"/>
+                <a:cs typeface="맑은 고딕"/>
               </a:rPr>
               <a:t>docker build -t {dockerhub_id}/myflask:v1 .</a:t>
             </a:r>
@@ -5297,6 +5321,8 @@
                   <a:srgbClr val="0D9488"/>
                 </a:solidFill>
                 <a:latin typeface="맑은 고딕"/>
+                <a:ea typeface="맑은 고딕"/>
+                <a:cs typeface="맑은 고딕"/>
               </a:rPr>
               <a:t>●  </a:t>
             </a:r>
@@ -5306,6 +5332,8 @@
                   <a:srgbClr val="222733"/>
                 </a:solidFill>
                 <a:latin typeface="맑은 고딕"/>
+                <a:ea typeface="맑은 고딕"/>
+                <a:cs typeface="맑은 고딕"/>
               </a:rPr>
               <a:t>docker push {dockerhub_id}/myflask:v1</a:t>
             </a:r>
@@ -5322,6 +5350,8 @@
                   <a:srgbClr val="0D9488"/>
                 </a:solidFill>
                 <a:latin typeface="맑은 고딕"/>
+                <a:ea typeface="맑은 고딕"/>
+                <a:cs typeface="맑은 고딕"/>
               </a:rPr>
               <a:t>●  </a:t>
             </a:r>
@@ -5331,6 +5361,8 @@
                   <a:srgbClr val="222733"/>
                 </a:solidFill>
                 <a:latin typeface="맑은 고딕"/>
+                <a:ea typeface="맑은 고딕"/>
+                <a:cs typeface="맑은 고딕"/>
               </a:rPr>
               <a:t>Docker Hub 웹사이트에서 본인 저장소에 이미지가 올라갔는지 확인</a:t>
             </a:r>
@@ -5366,6 +5398,8 @@
                   <a:srgbClr val="5B6373"/>
                 </a:solidFill>
                 <a:latin typeface="맑은 고딕"/>
+                <a:ea typeface="맑은 고딕"/>
+                <a:cs typeface="맑은 고딕"/>
               </a:rPr>
               <a:t>클라우드인프라관리  ·  3주차 3차시</a:t>
             </a:r>
@@ -5401,6 +5435,8 @@
                   <a:srgbClr val="5B6373"/>
                 </a:solidFill>
                 <a:latin typeface="맑은 고딕"/>
+                <a:ea typeface="맑은 고딕"/>
+                <a:cs typeface="맑은 고딕"/>
               </a:rPr>
               <a:t>10 / 12</a:t>
             </a:r>
@@ -5586,6 +5622,8 @@
                   <a:srgbClr val="FFFFFF"/>
                 </a:solidFill>
                 <a:latin typeface="맑은 고딕"/>
+                <a:ea typeface="맑은 고딕"/>
+                <a:cs typeface="맑은 고딕"/>
               </a:rPr>
               <a:t>오늘의 정리</a:t>
             </a:r>
@@ -5639,6 +5677,8 @@
                   <a:srgbClr val="14213D"/>
                 </a:solidFill>
                 <a:latin typeface="맑은 고딕"/>
+                <a:ea typeface="맑은 고딕"/>
+                <a:cs typeface="맑은 고딕"/>
               </a:rPr>
               <a:t>1</a:t>
             </a:r>
@@ -5674,6 +5714,8 @@
                   <a:srgbClr val="FFFFFF"/>
                 </a:solidFill>
                 <a:latin typeface="맑은 고딕"/>
+                <a:ea typeface="맑은 고딕"/>
+                <a:cs typeface="맑은 고딕"/>
               </a:rPr>
               <a:t>자주 안 바뀌는 명령어를 위에, 자주 바뀌는 걸 아래에 두면 빌드가 빨라진다</a:t>
             </a:r>
@@ -5727,6 +5769,8 @@
                   <a:srgbClr val="14213D"/>
                 </a:solidFill>
                 <a:latin typeface="맑은 고딕"/>
+                <a:ea typeface="맑은 고딕"/>
+                <a:cs typeface="맑은 고딕"/>
               </a:rPr>
               <a:t>2</a:t>
             </a:r>
@@ -5762,6 +5806,8 @@
                   <a:srgbClr val="FFFFFF"/>
                 </a:solidFill>
                 <a:latin typeface="맑은 고딕"/>
+                <a:ea typeface="맑은 고딕"/>
+                <a:cs typeface="맑은 고딕"/>
               </a:rPr>
               <a:t>.dockerignore로 불필요한 파일을 이미지에서 제외한다</a:t>
             </a:r>
@@ -5903,6 +5949,8 @@
                   <a:srgbClr val="FFFFFF"/>
                 </a:solidFill>
                 <a:latin typeface="맑은 고딕"/>
+                <a:ea typeface="맑은 고딕"/>
+                <a:cs typeface="맑은 고딕"/>
               </a:rPr>
               <a:t>다음 주 예고</a:t>
             </a:r>
@@ -5938,6 +5986,8 @@
                   <a:srgbClr val="14B8A6"/>
                 </a:solidFill>
                 <a:latin typeface="맑은 고딕"/>
+                <a:ea typeface="맑은 고딕"/>
+                <a:cs typeface="맑은 고딕"/>
               </a:rPr>
               <a:t>다음 차시 예고 — 4주차 — Kubernetes 아키텍처 및 Pod/Deployment 기초</a:t>
             </a:r>
@@ -5973,6 +6023,8 @@
                   <a:srgbClr val="FFFFFF"/>
                 </a:solidFill>
                 <a:latin typeface="맑은 고딕"/>
+                <a:ea typeface="맑은 고딕"/>
+                <a:cs typeface="맑은 고딕"/>
               </a:rPr>
               <a:t>지금까지는 컨테이너 하나하나를 직접 다뤘습니다. 다음 주부터는 여러 컨테이너를 자동으로 관리해주는 Kubernetes를 배웁니다.</a:t>
             </a:r>
@@ -6158,6 +6210,8 @@
                   <a:srgbClr val="14B8A6"/>
                 </a:solidFill>
                 <a:latin typeface="맑은 고딕"/>
+                <a:ea typeface="맑은 고딕"/>
+                <a:cs typeface="맑은 고딕"/>
               </a:rPr>
               <a:t>3주차를 마치며</a:t>
             </a:r>
@@ -6193,6 +6247,8 @@
                   <a:srgbClr val="FFFFFF"/>
                 </a:solidFill>
                 <a:latin typeface="맑은 고딕"/>
+                <a:ea typeface="맑은 고딕"/>
+                <a:cs typeface="맑은 고딕"/>
               </a:rPr>
               <a:t>수고하셨습니다!</a:t>
             </a:r>
@@ -6232,6 +6288,8 @@
                   <a:srgbClr val="C9D3E6"/>
                 </a:solidFill>
                 <a:latin typeface="맑은 고딕"/>
+                <a:ea typeface="맑은 고딕"/>
+                <a:cs typeface="맑은 고딕"/>
               </a:rPr>
               <a:t>Dockerfile로 나만의 이미지를 직접 만들고 배포까지 해보며 Docker 단원을 완주하셨습니다. 다음 주부터는 Kubernetes가 시작됩니다.</a:t>
             </a:r>
@@ -6373,6 +6431,8 @@
                   <a:srgbClr val="14B8A6"/>
                 </a:solidFill>
                 <a:latin typeface="맑은 고딕"/>
+                <a:ea typeface="맑은 고딕"/>
+                <a:cs typeface="맑은 고딕"/>
               </a:rPr>
               <a:t>SESSION OVERVIEW</a:t>
             </a:r>
@@ -6408,6 +6468,8 @@
                   <a:srgbClr val="FFFFFF"/>
                 </a:solidFill>
                 <a:latin typeface="맑은 고딕"/>
+                <a:ea typeface="맑은 고딕"/>
+                <a:cs typeface="맑은 고딕"/>
               </a:rPr>
               <a:t>오늘의 학습 목표</a:t>
             </a:r>
@@ -6447,6 +6509,8 @@
                   <a:srgbClr val="222733"/>
                 </a:solidFill>
                 <a:latin typeface="맑은 고딕"/>
+                <a:ea typeface="맑은 고딕"/>
+                <a:cs typeface="맑은 고딕"/>
               </a:rPr>
               <a:t>1.  레이어 캐싱 원리를 이해하고 Dockerfile 순서를 최적화한다</a:t>
             </a:r>
@@ -6463,6 +6527,8 @@
                   <a:srgbClr val="222733"/>
                 </a:solidFill>
                 <a:latin typeface="맑은 고딕"/>
+                <a:ea typeface="맑은 고딕"/>
+                <a:cs typeface="맑은 고딕"/>
               </a:rPr>
               <a:t>2.  .dockerignore로 불필요한 파일을 빌드에서 제외한다</a:t>
             </a:r>
@@ -6479,6 +6545,8 @@
                   <a:srgbClr val="222733"/>
                 </a:solidFill>
                 <a:latin typeface="맑은 고딕"/>
+                <a:ea typeface="맑은 고딕"/>
+                <a:cs typeface="맑은 고딕"/>
               </a:rPr>
               <a:t>3.  (선택) 완성한 이미지를 Docker Hub에 올려본다</a:t>
             </a:r>
@@ -6514,6 +6582,8 @@
                   <a:srgbClr val="5B6373"/>
                 </a:solidFill>
                 <a:latin typeface="맑은 고딕"/>
+                <a:ea typeface="맑은 고딕"/>
+                <a:cs typeface="맑은 고딕"/>
               </a:rPr>
               <a:t>클라우드인프라관리  ·  3주차 3차시</a:t>
             </a:r>
@@ -6549,6 +6619,8 @@
                   <a:srgbClr val="5B6373"/>
                 </a:solidFill>
                 <a:latin typeface="맑은 고딕"/>
+                <a:ea typeface="맑은 고딕"/>
+                <a:cs typeface="맑은 고딕"/>
               </a:rPr>
               <a:t>02 / 12</a:t>
             </a:r>
@@ -6734,6 +6806,8 @@
                   <a:srgbClr val="14B8A6"/>
                 </a:solidFill>
                 <a:latin typeface="맑은 고딕"/>
+                <a:ea typeface="맑은 고딕"/>
+                <a:cs typeface="맑은 고딕"/>
               </a:rPr>
               <a:t>SESSION OVERVIEW</a:t>
             </a:r>
@@ -6769,6 +6843,8 @@
                   <a:srgbClr val="FFFFFF"/>
                 </a:solidFill>
                 <a:latin typeface="맑은 고딕"/>
+                <a:ea typeface="맑은 고딕"/>
+                <a:cs typeface="맑은 고딕"/>
               </a:rPr>
               <a:t>오늘의 진행 순서</a:t>
             </a:r>
@@ -6980,6 +7056,8 @@
                   <a:srgbClr val="FFFFFF"/>
                 </a:solidFill>
                 <a:latin typeface="맑은 고딕"/>
+                <a:ea typeface="맑은 고딕"/>
+                <a:cs typeface="맑은 고딕"/>
               </a:rPr>
               <a:t>1</a:t>
             </a:r>
@@ -7063,6 +7141,8 @@
                   <a:srgbClr val="14213D"/>
                 </a:solidFill>
                 <a:latin typeface="맑은 고딕"/>
+                <a:ea typeface="맑은 고딕"/>
+                <a:cs typeface="맑은 고딕"/>
               </a:rPr>
               <a:t>개념 설명</a:t>
             </a:r>
@@ -7102,6 +7182,8 @@
                   <a:srgbClr val="222733"/>
                 </a:solidFill>
                 <a:latin typeface="맑은 고딕"/>
+                <a:ea typeface="맑은 고딕"/>
+                <a:cs typeface="맑은 고딕"/>
               </a:rPr>
               <a:t>강의자료 기반 직접 강의</a:t>
             </a:r>
@@ -7181,6 +7263,8 @@
                   <a:srgbClr val="FFFFFF"/>
                 </a:solidFill>
                 <a:latin typeface="맑은 고딕"/>
+                <a:ea typeface="맑은 고딕"/>
+                <a:cs typeface="맑은 고딕"/>
               </a:rPr>
               <a:t>2</a:t>
             </a:r>
@@ -7264,6 +7348,8 @@
                   <a:srgbClr val="14213D"/>
                 </a:solidFill>
                 <a:latin typeface="맑은 고딕"/>
+                <a:ea typeface="맑은 고딕"/>
+                <a:cs typeface="맑은 고딕"/>
               </a:rPr>
               <a:t>Killercoda</a:t>
             </a:r>
@@ -7303,6 +7389,8 @@
                   <a:srgbClr val="222733"/>
                 </a:solidFill>
                 <a:latin typeface="맑은 고딕"/>
+                <a:ea typeface="맑은 고딕"/>
+                <a:cs typeface="맑은 고딕"/>
               </a:rPr>
               <a:t>최적화 전후 빌드 속도 비교</a:t>
             </a:r>
@@ -7382,6 +7470,8 @@
                   <a:srgbClr val="FFFFFF"/>
                 </a:solidFill>
                 <a:latin typeface="맑은 고딕"/>
+                <a:ea typeface="맑은 고딕"/>
+                <a:cs typeface="맑은 고딕"/>
               </a:rPr>
               <a:t>3</a:t>
             </a:r>
@@ -7465,6 +7555,8 @@
                   <a:srgbClr val="14213D"/>
                 </a:solidFill>
                 <a:latin typeface="맑은 고딕"/>
+                <a:ea typeface="맑은 고딕"/>
+                <a:cs typeface="맑은 고딕"/>
               </a:rPr>
               <a:t>VM 안내</a:t>
             </a:r>
@@ -7504,6 +7596,8 @@
                   <a:srgbClr val="222733"/>
                 </a:solidFill>
                 <a:latin typeface="맑은 고딕"/>
+                <a:ea typeface="맑은 고딕"/>
+                <a:cs typeface="맑은 고딕"/>
               </a:rPr>
               <a:t>(선택) Docker Hub push</a:t>
             </a:r>
@@ -7583,6 +7677,8 @@
                   <a:srgbClr val="FFFFFF"/>
                 </a:solidFill>
                 <a:latin typeface="맑은 고딕"/>
+                <a:ea typeface="맑은 고딕"/>
+                <a:cs typeface="맑은 고딕"/>
               </a:rPr>
               <a:t>4</a:t>
             </a:r>
@@ -7666,6 +7762,8 @@
                   <a:srgbClr val="14213D"/>
                 </a:solidFill>
                 <a:latin typeface="맑은 고딕"/>
+                <a:ea typeface="맑은 고딕"/>
+                <a:cs typeface="맑은 고딕"/>
               </a:rPr>
               <a:t>결과 제출</a:t>
             </a:r>
@@ -7705,6 +7803,8 @@
                   <a:srgbClr val="222733"/>
                 </a:solidFill>
                 <a:latin typeface="맑은 고딕"/>
+                <a:ea typeface="맑은 고딕"/>
+                <a:cs typeface="맑은 고딕"/>
               </a:rPr>
               <a:t>체크리스트 제출</a:t>
             </a:r>
@@ -7740,6 +7840,8 @@
                   <a:srgbClr val="5B6373"/>
                 </a:solidFill>
                 <a:latin typeface="맑은 고딕"/>
+                <a:ea typeface="맑은 고딕"/>
+                <a:cs typeface="맑은 고딕"/>
               </a:rPr>
               <a:t>클라우드인프라관리  ·  3주차 3차시</a:t>
             </a:r>
@@ -7775,6 +7877,8 @@
                   <a:srgbClr val="5B6373"/>
                 </a:solidFill>
                 <a:latin typeface="맑은 고딕"/>
+                <a:ea typeface="맑은 고딕"/>
+                <a:cs typeface="맑은 고딕"/>
               </a:rPr>
               <a:t>03 / 12</a:t>
             </a:r>
@@ -7978,6 +8082,8 @@
                   <a:srgbClr val="14213D"/>
                 </a:solidFill>
                 <a:latin typeface="맑은 고딕"/>
+                <a:ea typeface="맑은 고딕"/>
+                <a:cs typeface="맑은 고딕"/>
               </a:rPr>
               <a:t>PART 01</a:t>
             </a:r>
@@ -8013,6 +8119,8 @@
                   <a:srgbClr val="FFFFFF"/>
                 </a:solidFill>
                 <a:latin typeface="맑은 고딕"/>
+                <a:ea typeface="맑은 고딕"/>
+                <a:cs typeface="맑은 고딕"/>
               </a:rPr>
               <a:t>레이어 캐싱</a:t>
             </a:r>
@@ -8048,6 +8156,8 @@
                   <a:srgbClr val="C9D3E6"/>
                 </a:solidFill>
                 <a:latin typeface="맑은 고딕"/>
+                <a:ea typeface="맑은 고딕"/>
+                <a:cs typeface="맑은 고딕"/>
               </a:rPr>
               <a:t>Dockerfile 순서가 빌드 속도를 좌우한다</a:t>
             </a:r>
@@ -8207,6 +8317,8 @@
                   <a:srgbClr val="14213D"/>
                 </a:solidFill>
                 <a:latin typeface="맑은 고딕"/>
+                <a:ea typeface="맑은 고딕"/>
+                <a:cs typeface="맑은 고딕"/>
               </a:rPr>
               <a:t>01</a:t>
             </a:r>
@@ -8242,6 +8354,8 @@
                   <a:srgbClr val="14B8A6"/>
                 </a:solidFill>
                 <a:latin typeface="맑은 고딕"/>
+                <a:ea typeface="맑은 고딕"/>
+                <a:cs typeface="맑은 고딕"/>
               </a:rPr>
               <a:t>PART 1 · 레이어 캐싱</a:t>
             </a:r>
@@ -8277,6 +8391,8 @@
                   <a:srgbClr val="FFFFFF"/>
                 </a:solidFill>
                 <a:latin typeface="맑은 고딕"/>
+                <a:ea typeface="맑은 고딕"/>
+                <a:cs typeface="맑은 고딕"/>
               </a:rPr>
               <a:t>레이어는 순서대로 재사용된다</a:t>
             </a:r>
@@ -8316,6 +8432,8 @@
                   <a:srgbClr val="0D9488"/>
                 </a:solidFill>
                 <a:latin typeface="맑은 고딕"/>
+                <a:ea typeface="맑은 고딕"/>
+                <a:cs typeface="맑은 고딕"/>
               </a:rPr>
               <a:t>●  </a:t>
             </a:r>
@@ -8325,6 +8443,8 @@
                   <a:srgbClr val="222733"/>
                 </a:solidFill>
                 <a:latin typeface="맑은 고딕"/>
+                <a:ea typeface="맑은 고딕"/>
+                <a:cs typeface="맑은 고딕"/>
               </a:rPr>
               <a:t>Dockerfile의 각 줄은 하나의 '레이어'가 되어 저장됨</a:t>
             </a:r>
@@ -8341,6 +8461,8 @@
                   <a:srgbClr val="0D9488"/>
                 </a:solidFill>
                 <a:latin typeface="맑은 고딕"/>
+                <a:ea typeface="맑은 고딕"/>
+                <a:cs typeface="맑은 고딕"/>
               </a:rPr>
               <a:t>●  </a:t>
             </a:r>
@@ -8350,6 +8472,8 @@
                   <a:srgbClr val="222733"/>
                 </a:solidFill>
                 <a:latin typeface="맑은 고딕"/>
+                <a:ea typeface="맑은 고딕"/>
+                <a:cs typeface="맑은 고딕"/>
               </a:rPr>
               <a:t>다시 빌드할 때, 바뀌지 않은 앞부분 레이어는 재사용(캐시)하고 넘어감</a:t>
             </a:r>
@@ -8366,6 +8490,8 @@
                   <a:srgbClr val="0D9488"/>
                 </a:solidFill>
                 <a:latin typeface="맑은 고딕"/>
+                <a:ea typeface="맑은 고딕"/>
+                <a:cs typeface="맑은 고딕"/>
               </a:rPr>
               <a:t>●  </a:t>
             </a:r>
@@ -8375,6 +8501,8 @@
                   <a:srgbClr val="222733"/>
                 </a:solidFill>
                 <a:latin typeface="맑은 고딕"/>
+                <a:ea typeface="맑은 고딕"/>
+                <a:cs typeface="맑은 고딕"/>
               </a:rPr>
               <a:t>그런데 중간에 바뀐 줄이 있으면, 그 아래 레이어는 전부 다시 만들어야 함</a:t>
             </a:r>
@@ -8454,6 +8582,8 @@
                   <a:srgbClr val="FFFFFF"/>
                 </a:solidFill>
                 <a:latin typeface="맑은 고딕"/>
+                <a:ea typeface="맑은 고딕"/>
+                <a:cs typeface="맑은 고딕"/>
               </a:rPr>
               <a:t>⚡  그래서 순서가 중요하다</a:t>
             </a:r>
@@ -8489,6 +8619,8 @@
                   <a:srgbClr val="FFFFFF"/>
                 </a:solidFill>
                 <a:latin typeface="맑은 고딕"/>
+                <a:ea typeface="맑은 고딕"/>
+                <a:cs typeface="맑은 고딕"/>
               </a:rPr>
               <a:t>자주 안 바뀌는 것(RUN pip install)은 위에, 자주 바뀌는 것(COPY app.py)은 아래에 배치</a:t>
             </a:r>
@@ -8524,6 +8656,8 @@
                   <a:srgbClr val="5B6373"/>
                 </a:solidFill>
                 <a:latin typeface="맑은 고딕"/>
+                <a:ea typeface="맑은 고딕"/>
+                <a:cs typeface="맑은 고딕"/>
               </a:rPr>
               <a:t>클라우드인프라관리  ·  3주차 3차시</a:t>
             </a:r>
@@ -8559,6 +8693,8 @@
                   <a:srgbClr val="5B6373"/>
                 </a:solidFill>
                 <a:latin typeface="맑은 고딕"/>
+                <a:ea typeface="맑은 고딕"/>
+                <a:cs typeface="맑은 고딕"/>
               </a:rPr>
               <a:t>05 / 12</a:t>
             </a:r>
@@ -8762,6 +8898,8 @@
                   <a:srgbClr val="14213D"/>
                 </a:solidFill>
                 <a:latin typeface="맑은 고딕"/>
+                <a:ea typeface="맑은 고딕"/>
+                <a:cs typeface="맑은 고딕"/>
               </a:rPr>
               <a:t>01</a:t>
             </a:r>
@@ -8797,6 +8935,8 @@
                   <a:srgbClr val="14B8A6"/>
                 </a:solidFill>
                 <a:latin typeface="맑은 고딕"/>
+                <a:ea typeface="맑은 고딕"/>
+                <a:cs typeface="맑은 고딕"/>
               </a:rPr>
               <a:t>PART 1 · 레이어 캐싱</a:t>
             </a:r>
@@ -8832,6 +8972,8 @@
                   <a:srgbClr val="FFFFFF"/>
                 </a:solidFill>
                 <a:latin typeface="맑은 고딕"/>
+                <a:ea typeface="맑은 고딕"/>
+                <a:cs typeface="맑은 고딕"/>
               </a:rPr>
               <a:t>나쁜 순서 vs 좋은 순서</a:t>
             </a:r>
@@ -8911,6 +9053,8 @@
                   <a:srgbClr val="FFFFFF"/>
                 </a:solidFill>
                 <a:latin typeface="맑은 고딕"/>
+                <a:ea typeface="맑은 고딕"/>
+                <a:cs typeface="맑은 고딕"/>
               </a:rPr>
               <a:t>구분</a:t>
             </a:r>
@@ -8990,6 +9134,8 @@
                   <a:srgbClr val="FFFFFF"/>
                 </a:solidFill>
                 <a:latin typeface="맑은 고딕"/>
+                <a:ea typeface="맑은 고딕"/>
+                <a:cs typeface="맑은 고딕"/>
               </a:rPr>
               <a:t>COPY 먼저 (나쁨)</a:t>
             </a:r>
@@ -9069,6 +9215,8 @@
                   <a:srgbClr val="FFFFFF"/>
                 </a:solidFill>
                 <a:latin typeface="맑은 고딕"/>
+                <a:ea typeface="맑은 고딕"/>
+                <a:cs typeface="맑은 고딕"/>
               </a:rPr>
               <a:t>RUN 먼저 (좋음)</a:t>
             </a:r>
@@ -9148,6 +9296,8 @@
                   <a:srgbClr val="14213D"/>
                 </a:solidFill>
                 <a:latin typeface="맑은 고딕"/>
+                <a:ea typeface="맑은 고딕"/>
+                <a:cs typeface="맑은 고딕"/>
               </a:rPr>
               <a:t>코드 한 줄만 수정 시</a:t>
             </a:r>
@@ -9227,6 +9377,8 @@
                   <a:srgbClr val="222733"/>
                 </a:solidFill>
                 <a:latin typeface="맑은 고딕"/>
+                <a:ea typeface="맑은 고딕"/>
+                <a:cs typeface="맑은 고딕"/>
               </a:rPr>
               <a:t>설치까지 처음부터 다시</a:t>
             </a:r>
@@ -9306,6 +9458,8 @@
                   <a:srgbClr val="222733"/>
                 </a:solidFill>
                 <a:latin typeface="맑은 고딕"/>
+                <a:ea typeface="맑은 고딕"/>
+                <a:cs typeface="맑은 고딕"/>
               </a:rPr>
               <a:t>설치는 캐시 재사용, COPY부터만</a:t>
             </a:r>
@@ -9385,6 +9539,8 @@
                   <a:srgbClr val="14213D"/>
                 </a:solidFill>
                 <a:latin typeface="맑은 고딕"/>
+                <a:ea typeface="맑은 고딕"/>
+                <a:cs typeface="맑은 고딕"/>
               </a:rPr>
               <a:t>체감 빌드 시간</a:t>
             </a:r>
@@ -9464,6 +9620,8 @@
                   <a:srgbClr val="222733"/>
                 </a:solidFill>
                 <a:latin typeface="맑은 고딕"/>
+                <a:ea typeface="맑은 고딕"/>
+                <a:cs typeface="맑은 고딕"/>
               </a:rPr>
               <a:t>매번 느림</a:t>
             </a:r>
@@ -9543,6 +9701,8 @@
                   <a:srgbClr val="222733"/>
                 </a:solidFill>
                 <a:latin typeface="맑은 고딕"/>
+                <a:ea typeface="맑은 고딕"/>
+                <a:cs typeface="맑은 고딕"/>
               </a:rPr>
               <a:t>코드만 바뀌면 훨씬 빠름</a:t>
             </a:r>
@@ -9578,6 +9738,8 @@
                   <a:srgbClr val="5B6373"/>
                 </a:solidFill>
                 <a:latin typeface="맑은 고딕"/>
+                <a:ea typeface="맑은 고딕"/>
+                <a:cs typeface="맑은 고딕"/>
               </a:rPr>
               <a:t>클라우드인프라관리  ·  3주차 3차시</a:t>
             </a:r>
@@ -9613,6 +9775,8 @@
                   <a:srgbClr val="5B6373"/>
                 </a:solidFill>
                 <a:latin typeface="맑은 고딕"/>
+                <a:ea typeface="맑은 고딕"/>
+                <a:cs typeface="맑은 고딕"/>
               </a:rPr>
               <a:t>06 / 12</a:t>
             </a:r>
@@ -9816,6 +9980,8 @@
                   <a:srgbClr val="14213D"/>
                 </a:solidFill>
                 <a:latin typeface="맑은 고딕"/>
+                <a:ea typeface="맑은 고딕"/>
+                <a:cs typeface="맑은 고딕"/>
               </a:rPr>
               <a:t>PART 02</a:t>
             </a:r>
@@ -9851,6 +10017,8 @@
                   <a:srgbClr val="FFFFFF"/>
                 </a:solidFill>
                 <a:latin typeface="맑은 고딕"/>
+                <a:ea typeface="맑은 고딕"/>
+                <a:cs typeface="맑은 고딕"/>
               </a:rPr>
               <a:t>.dockerignore</a:t>
             </a:r>
@@ -9886,6 +10054,8 @@
                   <a:srgbClr val="C9D3E6"/>
                 </a:solidFill>
                 <a:latin typeface="맑은 고딕"/>
+                <a:ea typeface="맑은 고딕"/>
+                <a:cs typeface="맑은 고딕"/>
               </a:rPr>
               <a:t>불필요한 파일은 애초에 제외하기</a:t>
             </a:r>
@@ -10045,6 +10215,8 @@
                   <a:srgbClr val="14213D"/>
                 </a:solidFill>
                 <a:latin typeface="맑은 고딕"/>
+                <a:ea typeface="맑은 고딕"/>
+                <a:cs typeface="맑은 고딕"/>
               </a:rPr>
               <a:t>02</a:t>
             </a:r>
@@ -10080,6 +10252,8 @@
                   <a:srgbClr val="14B8A6"/>
                 </a:solidFill>
                 <a:latin typeface="맑은 고딕"/>
+                <a:ea typeface="맑은 고딕"/>
+                <a:cs typeface="맑은 고딕"/>
               </a:rPr>
               <a:t>PART 2 · .dockerignore</a:t>
             </a:r>
@@ -10115,6 +10289,8 @@
                   <a:srgbClr val="FFFFFF"/>
                 </a:solidFill>
                 <a:latin typeface="맑은 고딕"/>
+                <a:ea typeface="맑은 고딕"/>
+                <a:cs typeface="맑은 고딕"/>
               </a:rPr>
               <a:t>.dockerignore란?</a:t>
             </a:r>
@@ -10154,6 +10330,8 @@
                   <a:srgbClr val="0D9488"/>
                 </a:solidFill>
                 <a:latin typeface="맑은 고딕"/>
+                <a:ea typeface="맑은 고딕"/>
+                <a:cs typeface="맑은 고딕"/>
               </a:rPr>
               <a:t>●  </a:t>
             </a:r>
@@ -10163,6 +10341,8 @@
                   <a:srgbClr val="222733"/>
                 </a:solidFill>
                 <a:latin typeface="맑은 고딕"/>
+                <a:ea typeface="맑은 고딕"/>
+                <a:cs typeface="맑은 고딕"/>
               </a:rPr>
               <a:t>.gitignore와 비슷하게, 빌드 시 이미지에 포함하지 않을 파일·폴더를 지정</a:t>
             </a:r>
@@ -10179,6 +10359,8 @@
                   <a:srgbClr val="0D9488"/>
                 </a:solidFill>
                 <a:latin typeface="맑은 고딕"/>
+                <a:ea typeface="맑은 고딕"/>
+                <a:cs typeface="맑은 고딕"/>
               </a:rPr>
               <a:t>●  </a:t>
             </a:r>
@@ -10188,6 +10370,8 @@
                   <a:srgbClr val="222733"/>
                 </a:solidFill>
                 <a:latin typeface="맑은 고딕"/>
+                <a:ea typeface="맑은 고딕"/>
+                <a:cs typeface="맑은 고딕"/>
               </a:rPr>
               <a:t>예: __pycache__/, .git/, *.log</a:t>
             </a:r>
@@ -10204,6 +10388,8 @@
                   <a:srgbClr val="0D9488"/>
                 </a:solidFill>
                 <a:latin typeface="맑은 고딕"/>
+                <a:ea typeface="맑은 고딕"/>
+                <a:cs typeface="맑은 고딕"/>
               </a:rPr>
               <a:t>●  </a:t>
             </a:r>
@@ -10213,6 +10399,8 @@
                   <a:srgbClr val="222733"/>
                 </a:solidFill>
                 <a:latin typeface="맑은 고딕"/>
+                <a:ea typeface="맑은 고딕"/>
+                <a:cs typeface="맑은 고딕"/>
               </a:rPr>
               <a:t>불필요한 파일이 빠지면 이미지 용량이 줄고 빌드도 빨라짐</a:t>
             </a:r>
@@ -10229,6 +10417,8 @@
                   <a:srgbClr val="0D9488"/>
                 </a:solidFill>
                 <a:latin typeface="맑은 고딕"/>
+                <a:ea typeface="맑은 고딕"/>
+                <a:cs typeface="맑은 고딕"/>
               </a:rPr>
               <a:t>●  </a:t>
             </a:r>
@@ -10238,6 +10428,8 @@
                   <a:srgbClr val="222733"/>
                 </a:solidFill>
                 <a:latin typeface="맑은 고딕"/>
+                <a:ea typeface="맑은 고딕"/>
+                <a:cs typeface="맑은 고딕"/>
               </a:rPr>
               <a:t>COPY . . 처럼 폴더 전체를 복사할 때 특히 중요</a:t>
             </a:r>
@@ -10273,6 +10465,8 @@
                   <a:srgbClr val="5B6373"/>
                 </a:solidFill>
                 <a:latin typeface="맑은 고딕"/>
+                <a:ea typeface="맑은 고딕"/>
+                <a:cs typeface="맑은 고딕"/>
               </a:rPr>
               <a:t>클라우드인프라관리  ·  3주차 3차시</a:t>
             </a:r>
@@ -10308,6 +10502,8 @@
                   <a:srgbClr val="5B6373"/>
                 </a:solidFill>
                 <a:latin typeface="맑은 고딕"/>
+                <a:ea typeface="맑은 고딕"/>
+                <a:cs typeface="맑은 고딕"/>
               </a:rPr>
               <a:t>08 / 12</a:t>
             </a:r>
@@ -10511,6 +10707,8 @@
                   <a:srgbClr val="14213D"/>
                 </a:solidFill>
                 <a:latin typeface="맑은 고딕"/>
+                <a:ea typeface="맑은 고딕"/>
+                <a:cs typeface="맑은 고딕"/>
               </a:rPr>
               <a:t>03</a:t>
             </a:r>
@@ -10546,6 +10744,8 @@
                   <a:srgbClr val="14B8A6"/>
                 </a:solidFill>
                 <a:latin typeface="맑은 고딕"/>
+                <a:ea typeface="맑은 고딕"/>
+                <a:cs typeface="맑은 고딕"/>
               </a:rPr>
               <a:t>실습 안내</a:t>
             </a:r>
@@ -10581,6 +10781,8 @@
                   <a:srgbClr val="FFFFFF"/>
                 </a:solidFill>
                 <a:latin typeface="맑은 고딕"/>
+                <a:ea typeface="맑은 고딕"/>
+                <a:cs typeface="맑은 고딕"/>
               </a:rPr>
               <a:t>Killercoda — 최적화 전후 비교</a:t>
             </a:r>
@@ -10620,6 +10822,8 @@
                   <a:srgbClr val="0D9488"/>
                 </a:solidFill>
                 <a:latin typeface="맑은 고딕"/>
+                <a:ea typeface="맑은 고딕"/>
+                <a:cs typeface="맑은 고딕"/>
               </a:rPr>
               <a:t>●  </a:t>
             </a:r>
@@ -10629,6 +10833,8 @@
                   <a:srgbClr val="222733"/>
                 </a:solidFill>
                 <a:latin typeface="맑은 고딕"/>
+                <a:ea typeface="맑은 고딕"/>
+                <a:cs typeface="맑은 고딕"/>
               </a:rPr>
               <a:t>RUN pip install을 COPY app.py . 아래로 옮긴 '나쁜' Dockerfile로 빌드 → 시간 기록</a:t>
             </a:r>
@@ -10645,6 +10851,8 @@
                   <a:srgbClr val="0D9488"/>
                 </a:solidFill>
                 <a:latin typeface="맑은 고딕"/>
+                <a:ea typeface="맑은 고딕"/>
+                <a:cs typeface="맑은 고딕"/>
               </a:rPr>
               <a:t>●  </a:t>
             </a:r>
@@ -10654,6 +10862,8 @@
                   <a:srgbClr val="222733"/>
                 </a:solidFill>
                 <a:latin typeface="맑은 고딕"/>
+                <a:ea typeface="맑은 고딕"/>
+                <a:cs typeface="맑은 고딕"/>
               </a:rPr>
               <a:t>app.py 내용만 한 줄 수정 후 다시 빌드 → 처음부터 다시 걸리는 시간 확인</a:t>
             </a:r>
@@ -10670,6 +10880,8 @@
                   <a:srgbClr val="0D9488"/>
                 </a:solidFill>
                 <a:latin typeface="맑은 고딕"/>
+                <a:ea typeface="맑은 고딕"/>
+                <a:cs typeface="맑은 고딕"/>
               </a:rPr>
               <a:t>●  </a:t>
             </a:r>
@@ -10679,6 +10891,8 @@
                   <a:srgbClr val="222733"/>
                 </a:solidFill>
                 <a:latin typeface="맑은 고딕"/>
+                <a:ea typeface="맑은 고딕"/>
+                <a:cs typeface="맑은 고딕"/>
               </a:rPr>
               <a:t>RUN을 COPY보다 위로 옮긴 '좋은' Dockerfile로 교체</a:t>
             </a:r>
@@ -10695,6 +10909,8 @@
                   <a:srgbClr val="0D9488"/>
                 </a:solidFill>
                 <a:latin typeface="맑은 고딕"/>
+                <a:ea typeface="맑은 고딕"/>
+                <a:cs typeface="맑은 고딕"/>
               </a:rPr>
               <a:t>●  </a:t>
             </a:r>
@@ -10704,6 +10920,8 @@
                   <a:srgbClr val="222733"/>
                 </a:solidFill>
                 <a:latin typeface="맑은 고딕"/>
+                <a:ea typeface="맑은 고딕"/>
+                <a:cs typeface="맑은 고딕"/>
               </a:rPr>
               <a:t>다시 app.py 수정 후 빌드 → 캐시 덕분에 훨씬 빨라진 것 확인</a:t>
             </a:r>
@@ -10739,6 +10957,8 @@
                   <a:srgbClr val="5B6373"/>
                 </a:solidFill>
                 <a:latin typeface="맑은 고딕"/>
+                <a:ea typeface="맑은 고딕"/>
+                <a:cs typeface="맑은 고딕"/>
               </a:rPr>
               <a:t>클라우드인프라관리  ·  3주차 3차시</a:t>
             </a:r>
@@ -10774,6 +10994,8 @@
                   <a:srgbClr val="5B6373"/>
                 </a:solidFill>
                 <a:latin typeface="맑은 고딕"/>
+                <a:ea typeface="맑은 고딕"/>
+                <a:cs typeface="맑은 고딕"/>
               </a:rPr>
               <a:t>09 / 12</a:t>
             </a:r>

--- a/class/cloud_infra_mgmt/03주차_Docker심화/01_강의자료/3차시_이미지최적화와DockerHub배포.pptx
+++ b/class/cloud_infra_mgmt/03주차_Docker심화/01_강의자료/3차시_이미지최적화와DockerHub배포.pptx
@@ -5438,7 +5438,7 @@
                 <a:ea typeface="맑은 고딕"/>
                 <a:cs typeface="맑은 고딕"/>
               </a:rPr>
-              <a:t>10 / 12</a:t>
+              <a:t>10 / 13</a:t>
             </a:r>
           </a:p>
         </p:txBody>
@@ -6622,7 +6622,7 @@
                 <a:ea typeface="맑은 고딕"/>
                 <a:cs typeface="맑은 고딕"/>
               </a:rPr>
-              <a:t>02 / 12</a:t>
+              <a:t>02 / 13</a:t>
             </a:r>
           </a:p>
         </p:txBody>
@@ -7880,7 +7880,7 @@
                 <a:ea typeface="맑은 고딕"/>
                 <a:cs typeface="맑은 고딕"/>
               </a:rPr>
-              <a:t>03 / 12</a:t>
+              <a:t>03 / 13</a:t>
             </a:r>
           </a:p>
         </p:txBody>
@@ -8696,7 +8696,7 @@
                 <a:ea typeface="맑은 고딕"/>
                 <a:cs typeface="맑은 고딕"/>
               </a:rPr>
-              <a:t>05 / 12</a:t>
+              <a:t>05 / 13</a:t>
             </a:r>
           </a:p>
         </p:txBody>
@@ -9778,7 +9778,7 @@
                 <a:ea typeface="맑은 고딕"/>
                 <a:cs typeface="맑은 고딕"/>
               </a:rPr>
-              <a:t>06 / 12</a:t>
+              <a:t>06 / 13</a:t>
             </a:r>
           </a:p>
         </p:txBody>
@@ -10505,7 +10505,7 @@
                 <a:ea typeface="맑은 고딕"/>
                 <a:cs typeface="맑은 고딕"/>
               </a:rPr>
-              <a:t>08 / 12</a:t>
+              <a:t>08 / 13</a:t>
             </a:r>
           </a:p>
         </p:txBody>
@@ -10997,7 +10997,7 @@
                 <a:ea typeface="맑은 고딕"/>
                 <a:cs typeface="맑은 고딕"/>
               </a:rPr>
-              <a:t>09 / 12</a:t>
+              <a:t>09 / 13</a:t>
             </a:r>
           </a:p>
         </p:txBody>
